--- a/assets/pptx/catalog-183.pptx
+++ b/assets/pptx/catalog-183.pptx
@@ -3269,7 +3269,7 @@
                 <a:ea typeface="Ebrima"/>
                 <a:cs typeface="Ebrima"/>
               </a:rPr>
-              <a:t>ከተውቁት/ካልሆንኩት ውስጥ አንዱም አይቆጨኝም (2x)</a:t>
+              <a:t>ከተውቁት/ካልሆንኩት ውስጥ አንዱም አይቆጨኝም 2x</a:t>
             </a:r>
           </a:p>
         </p:txBody>
@@ -3354,7 +3354,7 @@
                 <a:ea typeface="Ebrima"/>
                 <a:cs typeface="Ebrima"/>
               </a:rPr>
-              <a:t>እዚህም እዚያም ማለት ቀረልኝ (2x)</a:t>
+              <a:t>እዚህም እዚያም ማለት ቀረልኝ 2x</a:t>
             </a:r>
           </a:p>
         </p:txBody>
@@ -3560,7 +3560,7 @@
                 <a:ea typeface="Ebrima"/>
                 <a:cs typeface="Ebrima"/>
               </a:rPr>
-              <a:t>አንተ የሕይወት ብርሃን (2x)</a:t>
+              <a:t>አንተ የሕይወት ብርሃን 2x</a:t>
             </a:r>
           </a:p>
           <a:p>
@@ -3596,7 +3596,7 @@
                 <a:ea typeface="Ebrima"/>
                 <a:cs typeface="Ebrima"/>
               </a:rPr>
-              <a:t>ታጠግባለህ ታረካለህ (2x)</a:t>
+              <a:t>ታጠግባለህ ታረካለህ 2x</a:t>
             </a:r>
           </a:p>
         </p:txBody>
@@ -3681,7 +3681,7 @@
                 <a:ea typeface="Ebrima"/>
                 <a:cs typeface="Ebrima"/>
               </a:rPr>
-              <a:t>ወዴት እሄዳለሁ (2x)</a:t>
+              <a:t>ወዴት እሄዳለሁ 2x</a:t>
             </a:r>
           </a:p>
           <a:p>
@@ -3699,7 +3699,7 @@
                 <a:ea typeface="Ebrima"/>
                 <a:cs typeface="Ebrima"/>
               </a:rPr>
-              <a:t>ተስፋዬ ነህ አንተን እጠጋለሁ (2x)</a:t>
+              <a:t>ተስፋዬ ነህ አንተን እጠጋለሁ 2x</a:t>
             </a:r>
           </a:p>
           <a:p>
@@ -3802,7 +3802,7 @@
                 <a:ea typeface="Ebrima"/>
                 <a:cs typeface="Ebrima"/>
               </a:rPr>
-              <a:t>አንተን ላመልክህ መጥቻለሁ (2x)</a:t>
+              <a:t>አንተን ላመልክህ መጥቻለሁ 2x</a:t>
             </a:r>
           </a:p>
           <a:p>
@@ -4080,7 +4080,7 @@
                 <a:ea typeface="Ebrima"/>
                 <a:cs typeface="Ebrima"/>
               </a:rPr>
-              <a:t>ብቸኛ መንገዴ ነህ (2x)</a:t>
+              <a:t>ብቸኛ መንገዴ ነህ 2x</a:t>
             </a:r>
           </a:p>
         </p:txBody>
@@ -4407,7 +4407,7 @@
                 <a:ea typeface="Ebrima"/>
                 <a:cs typeface="Ebrima"/>
               </a:rPr>
-              <a:t>ትውት/እርግፍ አድርጊያለሁ ሌላውን (2x)</a:t>
+              <a:t>ትውት/እርግፍ አድርጊያለሁ ሌላውን 2x</a:t>
             </a:r>
           </a:p>
         </p:txBody>
